--- a/docs/hub/estate/Faculty of Health and Education/Department of Education/Marketing/Jaskel/Open Day Education deck FINAL v2.pptx
+++ b/docs/hub/estate/Faculty of Health and Education/Department of Education/Marketing/Jaskel/Open Day Education deck FINAL v2.pptx
@@ -5185,7 +5185,7 @@
               </a:defRPr>
             </a:pPr>
             <a:r>
-              <a:t>Year 2 modules</a:t>
+              <a:t>Years 2 and 3</a:t>
             </a:r>
           </a:p>
         </p:txBody>
@@ -5217,11 +5217,24 @@
                 <a:solidFill>
                   <a:srgbClr val="0066CC"/>
                 </a:solidFill>
-                <a:latin typeface="Comic Sans MS"/>
-              </a:defRPr>
-            </a:pPr>
-            <a:r>
-              <a:t>• Pedagogy in Practice</a:t>
+                <a:latin typeface="Papyrus"/>
+              </a:defRPr>
+            </a:pPr>
+            <a:r>
+              <a:t>• Pedagogy in Practice, Inclusion and Difference</a:t>
+            </a:r>
+          </a:p>
+          <a:p>
+            <a:pPr lvl="1">
+              <a:defRPr sz="1800">
+                <a:solidFill>
+                  <a:srgbClr val="0066CC"/>
+                </a:solidFill>
+                <a:latin typeface="Papyrus"/>
+              </a:defRPr>
+            </a:pPr>
+            <a:r>
+              <a:t>• Research for Educators</a:t>
             </a:r>
           </a:p>
           <a:p>
@@ -5234,7 +5247,7 @@
               </a:defRPr>
             </a:pPr>
             <a:r>
-              <a:t>• Inclusion and Difference</a:t>
+              <a:t>• Placements 2 and 3</a:t>
             </a:r>
           </a:p>
           <a:p>
@@ -5247,20 +5260,7 @@
               </a:defRPr>
             </a:pPr>
             <a:r>
-              <a:t>• Research for Educators</a:t>
-            </a:r>
-          </a:p>
-          <a:p>
-            <a:pPr lvl="1">
-              <a:defRPr sz="1800">
-                <a:solidFill>
-                  <a:srgbClr val="0066CC"/>
-                </a:solidFill>
-                <a:latin typeface="Curlz MT"/>
-              </a:defRPr>
-            </a:pPr>
-            <a:r>
-              <a:t>• Placement 2</a:t>
+              <a:t>• Dissertation in Year 3 (you choose the topic!)</a:t>
             </a:r>
           </a:p>
         </p:txBody>
@@ -6903,11 +6903,11 @@
                 <a:solidFill>
                   <a:srgbClr val="0066CC"/>
                 </a:solidFill>
-                <a:latin typeface="Papyrus"/>
-              </a:defRPr>
-            </a:pPr>
-            <a:r>
-              <a:t>• Two years</a:t>
+                <a:latin typeface="Jokerman"/>
+              </a:defRPr>
+            </a:pPr>
+            <a:r>
+              <a:t>• Three years</a:t>
             </a:r>
           </a:p>
           <a:p>
@@ -6933,7 +6933,7 @@
               </a:defRPr>
             </a:pPr>
             <a:r>
-              <a:t>• Placements both years!</a:t>
+              <a:t>• Placements every year!</a:t>
             </a:r>
           </a:p>
         </p:txBody>
@@ -8755,11 +8755,11 @@
                 <a:solidFill>
                   <a:srgbClr val="0066CC"/>
                 </a:solidFill>
-                <a:latin typeface="Curlz MT"/>
-              </a:defRPr>
-            </a:pPr>
-            <a:r>
-              <a:t>• Two years</a:t>
+                <a:latin typeface="Segoe Script"/>
+              </a:defRPr>
+            </a:pPr>
+            <a:r>
+              <a:t>• Three years</a:t>
             </a:r>
           </a:p>
           <a:p>
@@ -9419,11 +9419,11 @@
                 <a:solidFill>
                   <a:srgbClr val="0066CC"/>
                 </a:solidFill>
-                <a:latin typeface="Jokerman"/>
-              </a:defRPr>
-            </a:pPr>
-            <a:r>
-              <a:t>• Two years</a:t>
+                <a:latin typeface="Comic Sans MS"/>
+              </a:defRPr>
+            </a:pPr>
+            <a:r>
+              <a:t>• Three years</a:t>
             </a:r>
           </a:p>
           <a:p>
